--- a/decks/geog-asia-china/geog-asia-china_ch4_shenzhen-tncs.pptx
+++ b/decks/geog-asia-china/geog-asia-china_ch4_shenzhen-tncs.pptx
@@ -124,30 +124,30 @@
   <p:extLst>
     <p:ext uri="{521415D9-36F7-43E2-AB2F-B90AF26B5E84}">
       <p14:sectionLst xmlns:p14="http://schemas.microsoft.com/office/powerpoint/2010/main">
-        <p14:section name="Opening" id="{491dadcb-cc17-ea4c-f584-0a2f295ccd97}">
+        <p14:section name="Opening" id="{5a802714-25c2-a699-e13f-52f8c2b8aaf2}">
           <p14:sldIdLst>
             <p14:sldId id="256"/>
           </p14:sldIdLst>
         </p14:section>
-        <p14:section name="Gate" id="{71de74d5-1298-3542-68ef-937cee87821d}">
+        <p14:section name="Gate" id="{87762f5e-96d1-ec4b-bfc2-0c41b6af2754}">
           <p14:sldIdLst>
             <p14:sldId id="257"/>
             <p14:sldId id="258"/>
           </p14:sldIdLst>
         </p14:section>
-        <p14:section name="Pre-teach" id="{076e0660-b556-dea0-8b2c-56c39433d51d}">
+        <p14:section name="Pre-teach" id="{306d9899-4b22-bb7a-d3bf-6a9df3ac999e}">
           <p14:sldIdLst>
             <p14:sldId id="259"/>
             <p14:sldId id="260"/>
           </p14:sldIdLst>
         </p14:section>
-        <p14:section name="Read-along" id="{8f943d14-072c-90b1-8222-c3d05be84128}">
+        <p14:section name="Read-along" id="{312c4de9-0b4c-804d-4821-a18de3d2b449}">
           <p14:sldIdLst>
             <p14:sldId id="261"/>
             <p14:sldId id="262"/>
           </p14:sldIdLst>
         </p14:section>
-        <p14:section name="Teach" id="{f4b9f5ad-cdfa-b488-802d-4e9ed317ee30}">
+        <p14:section name="Teach" id="{d01025e7-1ba7-0b4e-87ed-153f3aa8d47e}">
           <p14:sldIdLst>
             <p14:sldId id="263"/>
             <p14:sldId id="264"/>
@@ -155,19 +155,19 @@
             <p14:sldId id="266"/>
           </p14:sldIdLst>
         </p14:section>
-        <p14:section name="Routes" id="{18aa3fba-64cb-1c75-ff01-c18fc987fe76}">
+        <p14:section name="Routes" id="{9fdc8d7b-97e6-ed22-37df-e51e31b217d8}">
           <p14:sldIdLst>
             <p14:sldId id="267"/>
             <p14:sldId id="268"/>
             <p14:sldId id="269"/>
           </p14:sldIdLst>
         </p14:section>
-        <p14:section name="Close" id="{1760f868-688b-a360-7f20-2b921d290435}">
+        <p14:section name="Close" id="{2f765620-33f0-5ee7-a6e5-17873b46c6b1}">
           <p14:sldIdLst>
             <p14:sldId id="270"/>
           </p14:sldIdLst>
         </p14:section>
-        <p14:section name="Answers" id="{15ce6bf8-1a6c-13f7-47b6-e75831dba9d7}">
+        <p14:section name="Answers" id="{c2dcc3cf-33b1-8117-3319-da9051c6a6da}">
           <p14:sldIdLst>
             <p14:sldId id="271"/>
             <p14:sldId id="272"/>
@@ -2159,7 +2159,7 @@
               <a:rPr lang="en-US" dirty="0"/>
               <a:t>Teach — What is a TNC, and why China?. Say it in your own words, then check understanding with a quick question: ask a pupil from the pre-teach group first, since they met these words and ideas before the lesson. Pupils try to recall before you re-explain.
 A transnational corporation, or TNC (also called an MNC), is a firm that produces goods or services in one or more countries other than its home country. The home is usually a high income country (HIC); the factories are often in lower income countries (LICs) or newly emerging economies (NEEs), where costs are lower. Apple is the example in this unit. It was founded by Steve Jobs in California in 1976, and by 2004 it had largely moved its manufacturing abroad.
-An iPhone is a world product. Apple buys memory chips from Korea and Japan, display panels and circuitry from Korea and Taiwan, advanced semiconductors from Germany and Taiwan, and rare metals from Africa and Asia. About 90 percent of iPhone components are made outside the USA. Almost all of the 70 million iPhones, 30 million iPads and 59 million other products Apple sold in one year were manufactured overseas.
+An iPhone is a world product. Apple buys memory chips from Korea and Japan, display panels and circuitry from Korea and Taiwan, advanced semiconductors from Germany and Taiwan, and rare metals from Africa and Asia. About 90 percent of iPhone components are made outside the USA. In one year Apple sold 70 million iPhones, 30 million iPads and 59 million other products, and nearly every one of them was made overseas.
 Why China? Semi-skilled workers are cheaper; the Chinese government subsidises industries to make them more competitive; factories can change plans and hire thousands of workers at great speed; and firms build dormitories on site so that workers are available around the clock. Paying American wages would add up to US$65 to the shop price of each iPhone.
 Worked example — model it step by step, thinking aloud: Many Foxconn employees work six days a week, up to 12 hours a day. How many hours is that in a week? (1) Hours in a week = days worked × hours each day. (2) 6 × 12 = 72. (3) Compare: a full-time week in the UK is around 37 to 40 hours, so this is almost double. Answer: 72 hours a week.
 Tip: TNC: trans means across, national means countries. A firm that works across countries.</a:t>
